--- a/EcoMatic_Presentation.pptx
+++ b/EcoMatic_Presentation.pptx
@@ -4812,7 +4812,19 @@
             </a:r>
             <a:r>
               <a:rPr dirty="0"/>
-              <a:t>/Program. </a:t>
+              <a:t>/</a:t>
+            </a:r>
+            <a:r>
+              <a:rPr dirty="0" err="1"/>
+              <a:t>Program.</a:t>
+            </a:r>
+            <a:r>
+              <a:rPr lang="en-US" dirty="0" err="1"/>
+              <a:t>cs</a:t>
+            </a:r>
+            <a:r>
+              <a:rPr dirty="0"/>
+              <a:t> </a:t>
             </a:r>
             <a:endParaRPr lang="en-US" dirty="0"/>
           </a:p>
@@ -5734,85 +5746,6 @@
           <a:chExt cx="0" cy="0"/>
         </a:xfrm>
       </p:grpSpPr>
-      <p:sp>
-        <p:nvSpPr>
-          <p:cNvPr id="2" name="Rectangle 1"/>
-          <p:cNvSpPr/>
-          <p:nvPr/>
-        </p:nvSpPr>
-        <p:spPr>
-          <a:xfrm>
-            <a:off x="11640312" y="182880"/>
-            <a:ext cx="91440" cy="6492240"/>
-          </a:xfrm>
-          <a:prstGeom prst="rect">
-            <a:avLst/>
-          </a:prstGeom>
-          <a:solidFill>
-            <a:srgbClr val="4AC7B2"/>
-          </a:solidFill>
-          <a:ln>
-            <a:noFill/>
-          </a:ln>
-        </p:spPr>
-        <p:style>
-          <a:lnRef idx="1">
-            <a:schemeClr val="accent1"/>
-          </a:lnRef>
-          <a:fillRef idx="3">
-            <a:schemeClr val="accent1"/>
-          </a:fillRef>
-          <a:effectRef idx="2">
-            <a:schemeClr val="accent1"/>
-          </a:effectRef>
-          <a:fontRef idx="minor">
-            <a:schemeClr val="lt1"/>
-          </a:fontRef>
-        </p:style>
-        <p:txBody>
-          <a:bodyPr rtlCol="0" anchor="ctr"/>
-          <a:lstStyle/>
-          <a:p>
-            <a:pPr algn="ctr"/>
-            <a:endParaRPr/>
-          </a:p>
-        </p:txBody>
-      </p:sp>
-      <p:sp>
-        <p:nvSpPr>
-          <p:cNvPr id="3" name="TextBox 2"/>
-          <p:cNvSpPr txBox="1"/>
-          <p:nvPr/>
-        </p:nvSpPr>
-        <p:spPr>
-          <a:xfrm>
-            <a:off x="914400" y="228600"/>
-            <a:ext cx="10360152" cy="457200"/>
-          </a:xfrm>
-          <a:prstGeom prst="rect">
-            <a:avLst/>
-          </a:prstGeom>
-          <a:noFill/>
-        </p:spPr>
-        <p:txBody>
-          <a:bodyPr wrap="none">
-            <a:spAutoFit/>
-          </a:bodyPr>
-          <a:lstStyle/>
-          <a:p>
-            <a:pPr>
-              <a:defRPr sz="1600" b="1">
-                <a:solidFill>
-                  <a:srgbClr val="C3C9D5"/>
-                </a:solidFill>
-              </a:defRPr>
-            </a:pPr>
-            <a:r>
-              <a:t>C# Console Application Project Documentation</a:t>
-            </a:r>
-          </a:p>
-        </p:txBody>
-      </p:sp>
       <p:sp>
         <p:nvSpPr>
           <p:cNvPr id="4" name="Rounded Rectangle 3"/>
